--- a/Couchbase Architecture Deck.pptx
+++ b/Couchbase Architecture Deck.pptx
@@ -24507,7 +24507,7 @@
       </p:sp>
       <p:sp>
         <p:nvSpPr>
-          <p:cNvPr id="10" name="Shape 6"/>
+          <p:cNvPr id="20" name="Shape 6"/>
           <p:cNvSpPr/>
           <p:nvPr/>
         </p:nvSpPr>
